--- a/lectures/w09.pptx
+++ b/lectures/w09.pptx
@@ -5,16 +5,15 @@
     <p:sldMasterId id="2147483648" r:id="rId4"/>
   </p:sldMasterIdLst>
   <p:notesMasterIdLst>
-    <p:notesMasterId r:id="rId12"/>
+    <p:notesMasterId r:id="rId11"/>
   </p:notesMasterIdLst>
   <p:sldIdLst>
     <p:sldId id="257" r:id="rId5"/>
-    <p:sldId id="414" r:id="rId6"/>
-    <p:sldId id="437" r:id="rId7"/>
-    <p:sldId id="438" r:id="rId8"/>
-    <p:sldId id="439" r:id="rId9"/>
-    <p:sldId id="443" r:id="rId10"/>
-    <p:sldId id="440" r:id="rId11"/>
+    <p:sldId id="437" r:id="rId6"/>
+    <p:sldId id="438" r:id="rId7"/>
+    <p:sldId id="439" r:id="rId8"/>
+    <p:sldId id="443" r:id="rId9"/>
+    <p:sldId id="440" r:id="rId10"/>
   </p:sldIdLst>
   <p:sldSz cx="17340263" cy="9753600"/>
   <p:notesSz cx="6858000" cy="9144000"/>
@@ -322,7 +321,6 @@
         <p14:section name="Default Section" id="{26BAFA0B-07C8-4EE2-BF91-F7F05DBBE52E}">
           <p14:sldIdLst>
             <p14:sldId id="257"/>
-            <p14:sldId id="414"/>
             <p14:sldId id="437"/>
             <p14:sldId id="438"/>
             <p14:sldId id="439"/>
@@ -348,6 +346,35 @@
     </p:ext>
   </p:extLst>
 </p:presentation>
+</file>
+
+<file path=ppt/changesInfos/changesInfo1.xml><?xml version="1.0" encoding="utf-8"?>
+<pc:chgInfo xmlns:a="http://schemas.openxmlformats.org/drawingml/2006/main" xmlns:r="http://schemas.openxmlformats.org/officeDocument/2006/relationships" xmlns:ac="http://schemas.microsoft.com/office/drawing/2013/main/command" xmlns:pc="http://schemas.microsoft.com/office/powerpoint/2013/main/command">
+  <pc:docChgLst>
+    <pc:chgData name="Filomena, Gabriele" userId="237b0d7d-6741-478d-b529-08e8564676a7" providerId="ADAL" clId="{469BE4F6-2013-4FCF-B379-6E8D4E899C0F}"/>
+    <pc:docChg chg="delSld modSld modSection">
+      <pc:chgData name="Filomena, Gabriele" userId="237b0d7d-6741-478d-b529-08e8564676a7" providerId="ADAL" clId="{469BE4F6-2013-4FCF-B379-6E8D4E899C0F}" dt="2025-03-26T09:50:26.439" v="1" actId="47"/>
+      <pc:docMkLst>
+        <pc:docMk/>
+      </pc:docMkLst>
+      <pc:sldChg chg="modSp del mod">
+        <pc:chgData name="Filomena, Gabriele" userId="237b0d7d-6741-478d-b529-08e8564676a7" providerId="ADAL" clId="{469BE4F6-2013-4FCF-B379-6E8D4E899C0F}" dt="2025-03-26T09:50:26.439" v="1" actId="47"/>
+        <pc:sldMkLst>
+          <pc:docMk/>
+          <pc:sldMk cId="1685072746" sldId="414"/>
+        </pc:sldMkLst>
+        <pc:spChg chg="mod">
+          <ac:chgData name="Filomena, Gabriele" userId="237b0d7d-6741-478d-b529-08e8564676a7" providerId="ADAL" clId="{469BE4F6-2013-4FCF-B379-6E8D4E899C0F}" dt="2025-03-26T09:50:01.188" v="0" actId="6549"/>
+          <ac:spMkLst>
+            <pc:docMk/>
+            <pc:sldMk cId="1685072746" sldId="414"/>
+            <ac:spMk id="6" creationId="{68386F04-F31C-45D6-91A9-D8EBCF9148DE}"/>
+          </ac:spMkLst>
+        </pc:spChg>
+      </pc:sldChg>
+    </pc:docChg>
+  </pc:docChgLst>
+</pc:chgInfo>
 </file>
 
 <file path=ppt/notesMasters/notesMaster1.xml><?xml version="1.0" encoding="utf-8"?>
@@ -2350,7 +2377,7 @@
           <a:p>
             <a:fld id="{1D8BD707-D9CF-40AE-B4C6-C98DA3205C09}" type="datetimeFigureOut">
               <a:rPr lang="en-US"/>
-              <a:t>4/16/2024</a:t>
+              <a:t>3/26/2025</a:t>
             </a:fld>
             <a:endParaRPr lang="en-US"/>
           </a:p>
@@ -2451,7 +2478,7 @@
           </a:prstGeom>
           <a:extLst>
             <a:ext uri="{C572A759-6A51-4108-AA02-DFA0A04FC94B}">
-              <ma14:wrappingTextBoxFlag xmlns:ma14="http://schemas.microsoft.com/office/mac/drawingml/2011/main" xmlns:a14="http://schemas.microsoft.com/office/drawing/2010/main" xmlns:m="http://schemas.openxmlformats.org/officeDocument/2006/math" xmlns="" val="1"/>
+              <ma14:wrappingTextBoxFlag xmlns="" xmlns:m="http://schemas.openxmlformats.org/officeDocument/2006/math" xmlns:a14="http://schemas.microsoft.com/office/drawing/2010/main" xmlns:ma14="http://schemas.microsoft.com/office/mac/drawingml/2011/main" val="1"/>
             </a:ext>
           </a:extLst>
         </p:spPr>
@@ -2492,7 +2519,7 @@
           </a:ln>
           <a:extLst>
             <a:ext uri="{C572A759-6A51-4108-AA02-DFA0A04FC94B}">
-              <ma14:wrappingTextBoxFlag xmlns:ma14="http://schemas.microsoft.com/office/mac/drawingml/2011/main" xmlns:a14="http://schemas.microsoft.com/office/drawing/2010/main" xmlns:m="http://schemas.openxmlformats.org/officeDocument/2006/math" xmlns="" val="1"/>
+              <ma14:wrappingTextBoxFlag xmlns="" xmlns:m="http://schemas.openxmlformats.org/officeDocument/2006/math" xmlns:a14="http://schemas.microsoft.com/office/drawing/2010/main" xmlns:ma14="http://schemas.microsoft.com/office/mac/drawingml/2011/main" val="1"/>
             </a:ext>
           </a:extLst>
         </p:spPr>
@@ -3695,7 +3722,12 @@
             <p:ph type="title"/>
           </p:nvPr>
         </p:nvSpPr>
-        <p:spPr/>
+        <p:spPr>
+          <a:xfrm>
+            <a:off x="493200" y="871200"/>
+            <a:ext cx="14800185" cy="1490322"/>
+          </a:xfrm>
+        </p:spPr>
         <p:txBody>
           <a:bodyPr vert="horz" wrap="square" lIns="0" tIns="12869" rIns="0" bIns="0" rtlCol="0">
             <a:spAutoFit/>
@@ -3708,9 +3740,13 @@
               </a:spcBef>
             </a:pPr>
             <a:r>
-              <a:rPr lang="en-GB" spc="-11" dirty="0"/>
-              <a:t>Agenda</a:t>
-            </a:r>
+              <a:rPr lang="en-GB" dirty="0"/>
+              <a:t>Bokeh. A visualization library</a:t>
+            </a:r>
+            <a:br>
+              <a:rPr lang="en-GB" dirty="0"/>
+            </a:br>
+            <a:endParaRPr lang="en-GB" spc="-11" dirty="0"/>
           </a:p>
         </p:txBody>
       </p:sp>
@@ -3731,6 +3767,10 @@
           </p:nvPr>
         </p:nvSpPr>
         <p:spPr>
+          <a:xfrm>
+            <a:off x="493200" y="2091599"/>
+            <a:ext cx="16437488" cy="7090501"/>
+          </a:xfrm>
           <a:ln w="12700">
             <a:miter lim="400000"/>
           </a:ln>
@@ -3741,63 +3781,84 @@
           </a:bodyPr>
           <a:lstStyle/>
           <a:p>
-            <a:pPr>
+            <a:r>
+              <a:rPr lang="en-GB" dirty="0"/>
+              <a:t>Data visualisation.</a:t>
+            </a:r>
+          </a:p>
+          <a:p>
+            <a:r>
+              <a:rPr lang="en-GB" dirty="0"/>
+              <a:t>Versatile, high-performance rendering capabilities over large datasets or real-time data streams. </a:t>
+            </a:r>
+          </a:p>
+          <a:p>
+            <a:r>
+              <a:rPr lang="en-GB" dirty="0"/>
+              <a:t>Variety of output formats (HTML, notebook, etc.). </a:t>
+            </a:r>
+          </a:p>
+          <a:p>
+            <a:r>
+              <a:rPr lang="en-GB" dirty="0"/>
+              <a:t>Designed to generate interactive plots, dashboards, and data applications.</a:t>
+            </a:r>
+          </a:p>
+          <a:p>
+            <a:pPr marL="0" indent="0">
+              <a:buNone/>
+            </a:pPr>
+            <a:endParaRPr lang="en-GB" dirty="0"/>
+          </a:p>
+          <a:p>
+            <a:r>
+              <a:rPr lang="en-GB" b="1" dirty="0"/>
+              <a:t>Strengths</a:t>
+            </a:r>
+            <a:r>
+              <a:rPr lang="en-GB" dirty="0"/>
+              <a:t>: </a:t>
+            </a:r>
+            <a:r>
+              <a:rPr lang="en-GB" dirty="0">
+                <a:solidFill>
+                  <a:srgbClr val="FF0000"/>
+                </a:solidFill>
+              </a:rPr>
+              <a:t>customizable</a:t>
+            </a:r>
+            <a:r>
+              <a:rPr lang="en-GB" dirty="0"/>
+              <a:t>, great for creating complex and interactive visualizations.</a:t>
+            </a:r>
+          </a:p>
+          <a:p>
+            <a:r>
+              <a:rPr lang="en-GB" b="1" dirty="0"/>
+              <a:t>Use Case</a:t>
+            </a:r>
+            <a:r>
+              <a:rPr lang="en-GB" dirty="0"/>
+              <a:t>: Ideal when you need detailed control over interaction capabilities or when working with web-based dashboards.</a:t>
+            </a:r>
+          </a:p>
+          <a:p>
+            <a:pPr marL="0" indent="0">
               <a:lnSpc>
                 <a:spcPct val="120000"/>
               </a:lnSpc>
+              <a:buNone/>
             </a:pPr>
-            <a:r>
-              <a:rPr lang="en-GB" dirty="0">
-                <a:cs typeface="Calibri"/>
-              </a:rPr>
-              <a:t>Assignment I…</a:t>
-            </a:r>
-          </a:p>
-          <a:p>
-            <a:pPr>
-              <a:lnSpc>
-                <a:spcPct val="120000"/>
-              </a:lnSpc>
-            </a:pPr>
-            <a:r>
-              <a:rPr lang="en-GB" dirty="0">
-                <a:cs typeface="Calibri"/>
-              </a:rPr>
-              <a:t>Towards Assignment II</a:t>
-            </a:r>
-          </a:p>
-          <a:p>
-            <a:pPr>
-              <a:lnSpc>
-                <a:spcPct val="120000"/>
-              </a:lnSpc>
-            </a:pPr>
-            <a:r>
-              <a:rPr lang="en-GB" dirty="0">
-                <a:cs typeface="Calibri"/>
-              </a:rPr>
-              <a:t>Other Visualisation tools</a:t>
-            </a:r>
-          </a:p>
-          <a:p>
-            <a:pPr>
-              <a:lnSpc>
-                <a:spcPct val="120000"/>
-              </a:lnSpc>
-            </a:pPr>
-            <a:r>
-              <a:rPr lang="en-GB" dirty="0">
-                <a:cs typeface="Calibri"/>
-              </a:rPr>
-              <a:t>Animation and GPS Tracks -&gt; Lab</a:t>
-            </a:r>
+            <a:endParaRPr lang="en-GB" dirty="0">
+              <a:cs typeface="Calibri"/>
+            </a:endParaRPr>
           </a:p>
         </p:txBody>
       </p:sp>
     </p:spTree>
     <p:extLst>
       <p:ext uri="{BB962C8B-B14F-4D97-AF65-F5344CB8AC3E}">
-        <p14:creationId xmlns:p14="http://schemas.microsoft.com/office/powerpoint/2010/main" val="1685072746"/>
+        <p14:creationId xmlns:p14="http://schemas.microsoft.com/office/powerpoint/2010/main" val="2807889340"/>
       </p:ext>
     </p:extLst>
   </p:cSld>
@@ -3844,7 +3905,7 @@
         <p:spPr>
           <a:xfrm>
             <a:off x="493200" y="871200"/>
-            <a:ext cx="14800185" cy="1490322"/>
+            <a:ext cx="14800185" cy="751658"/>
           </a:xfrm>
         </p:spPr>
         <p:txBody>
@@ -3859,12 +3920,9 @@
               </a:spcBef>
             </a:pPr>
             <a:r>
-              <a:rPr lang="en-GB" dirty="0"/>
-              <a:t>Bokeh. A visualization library</a:t>
-            </a:r>
-            <a:br>
-              <a:rPr lang="en-GB" dirty="0"/>
-            </a:br>
+              <a:rPr lang="en-GB" spc="-11" dirty="0" err="1"/>
+              <a:t>HoloViews</a:t>
+            </a:r>
             <a:endParaRPr lang="en-GB" spc="-11" dirty="0"/>
           </a:p>
         </p:txBody>
@@ -3887,8 +3945,8 @@
         </p:nvSpPr>
         <p:spPr>
           <a:xfrm>
-            <a:off x="493200" y="2091599"/>
-            <a:ext cx="16437488" cy="7090501"/>
+            <a:off x="493199" y="2091600"/>
+            <a:ext cx="16290465" cy="6286500"/>
           </a:xfrm>
           <a:ln w="12700">
             <a:miter lim="400000"/>
@@ -3902,32 +3960,11 @@
           <a:p>
             <a:r>
               <a:rPr lang="en-GB" dirty="0"/>
-              <a:t>Data visualisation.</a:t>
-            </a:r>
-          </a:p>
-          <a:p>
-            <a:r>
-              <a:rPr lang="en-GB" dirty="0"/>
-              <a:t>Versatile, high-performance rendering capabilities over large datasets or real-time data streams. </a:t>
-            </a:r>
-          </a:p>
-          <a:p>
-            <a:r>
-              <a:rPr lang="en-GB" dirty="0"/>
-              <a:t>Variety of output formats (HTML, notebook, etc.). </a:t>
-            </a:r>
-          </a:p>
-          <a:p>
-            <a:r>
-              <a:rPr lang="en-GB" dirty="0"/>
-              <a:t>Designed to generate interactive plots, dashboards, and data applications.</a:t>
-            </a:r>
-          </a:p>
-          <a:p>
-            <a:pPr marL="0" indent="0">
-              <a:buNone/>
-            </a:pPr>
-            <a:endParaRPr lang="en-GB" dirty="0"/>
+              <a:t>Built on top of Bokeh and Matplotlib. </a:t>
+            </a:r>
+          </a:p>
+          <a:p>
+            <a:endParaRPr lang="en-GB" b="1" dirty="0"/>
           </a:p>
           <a:p>
             <a:r>
@@ -3936,7 +3973,17 @@
             </a:r>
             <a:r>
               <a:rPr lang="en-GB" dirty="0"/>
-              <a:t>: </a:t>
+              <a:t>: Highly abstract and lets you build complex visualizations easily. It automatically handles the plotting backend it uses (like Bokeh, Matplotlib).</a:t>
+            </a:r>
+          </a:p>
+          <a:p>
+            <a:r>
+              <a:rPr lang="en-GB" b="1" dirty="0"/>
+              <a:t>Use Case</a:t>
+            </a:r>
+            <a:r>
+              <a:rPr lang="en-GB" dirty="0"/>
+              <a:t>: Perfect for </a:t>
             </a:r>
             <a:r>
               <a:rPr lang="en-GB" dirty="0">
@@ -3944,40 +3991,31 @@
                   <a:srgbClr val="FF0000"/>
                 </a:solidFill>
               </a:rPr>
-              <a:t>customizable</a:t>
+              <a:t>exploratory data </a:t>
             </a:r>
             <a:r>
               <a:rPr lang="en-GB" dirty="0"/>
-              <a:t>, great for creating complex and interactive visualizations.</a:t>
-            </a:r>
-          </a:p>
-          <a:p>
-            <a:r>
-              <a:rPr lang="en-GB" b="1" dirty="0"/>
-              <a:t>Use Case</a:t>
+              <a:t>analysis where you want to create informative visualizations rapidly with </a:t>
+            </a:r>
+            <a:r>
+              <a:rPr lang="en-GB" dirty="0">
+                <a:solidFill>
+                  <a:srgbClr val="FF0000"/>
+                </a:solidFill>
+              </a:rPr>
+              <a:t>less focus </a:t>
             </a:r>
             <a:r>
               <a:rPr lang="en-GB" dirty="0"/>
-              <a:t>: Ideal when you need detailed control over interaction capabilities or when working with web-based dashboards.</a:t>
-            </a:r>
-          </a:p>
-          <a:p>
-            <a:pPr marL="0" indent="0">
-              <a:lnSpc>
-                <a:spcPct val="120000"/>
-              </a:lnSpc>
-              <a:buNone/>
-            </a:pPr>
-            <a:endParaRPr lang="en-GB" dirty="0">
-              <a:cs typeface="Calibri"/>
-            </a:endParaRPr>
+              <a:t>on the minute details of plot appearance.</a:t>
+            </a:r>
           </a:p>
         </p:txBody>
       </p:sp>
     </p:spTree>
     <p:extLst>
       <p:ext uri="{BB962C8B-B14F-4D97-AF65-F5344CB8AC3E}">
-        <p14:creationId xmlns:p14="http://schemas.microsoft.com/office/powerpoint/2010/main" val="2807889340"/>
+        <p14:creationId xmlns:p14="http://schemas.microsoft.com/office/powerpoint/2010/main" val="1625794283"/>
       </p:ext>
     </p:extLst>
   </p:cSld>
@@ -4040,7 +4078,7 @@
             </a:pPr>
             <a:r>
               <a:rPr lang="en-GB" spc="-11" dirty="0" err="1"/>
-              <a:t>HoloViews</a:t>
+              <a:t>GeoViews</a:t>
             </a:r>
             <a:endParaRPr lang="en-GB" spc="-11" dirty="0"/>
           </a:p>
@@ -4065,7 +4103,7 @@
         <p:spPr>
           <a:xfrm>
             <a:off x="493199" y="2091600"/>
-            <a:ext cx="16290465" cy="6286500"/>
+            <a:ext cx="16172477" cy="6286500"/>
           </a:xfrm>
           <a:ln w="12700">
             <a:miter lim="400000"/>
@@ -4079,11 +4117,25 @@
           <a:p>
             <a:r>
               <a:rPr lang="en-GB" dirty="0"/>
-              <a:t>Built on top of Bokeh and Matplotlib. </a:t>
-            </a:r>
-          </a:p>
-          <a:p>
-            <a:endParaRPr lang="en-GB" b="1" dirty="0"/>
+              <a:t>Built on top </a:t>
+            </a:r>
+            <a:r>
+              <a:rPr lang="en-GB" dirty="0" err="1"/>
+              <a:t>HoloViews</a:t>
+            </a:r>
+            <a:r>
+              <a:rPr lang="en-GB" dirty="0"/>
+              <a:t> designed to make it easier to explore and visualize geographical datasets</a:t>
+            </a:r>
+          </a:p>
+          <a:p>
+            <a:r>
+              <a:rPr lang="en-GB" dirty="0"/>
+              <a:t>Geographic data handling.</a:t>
+            </a:r>
+          </a:p>
+          <a:p>
+            <a:endParaRPr lang="en-GB" dirty="0"/>
           </a:p>
           <a:p>
             <a:r>
@@ -4092,49 +4144,44 @@
             </a:r>
             <a:r>
               <a:rPr lang="en-GB" dirty="0"/>
-              <a:t>: Highly abstract and lets you build complex visualizations easily. It automatically handles the plotting backend it uses (like Bokeh, Matplotlib).</a:t>
-            </a:r>
-          </a:p>
-          <a:p>
-            <a:r>
-              <a:rPr lang="en-GB" b="1" dirty="0"/>
-              <a:t>Use Case</a:t>
-            </a:r>
-            <a:r>
-              <a:rPr lang="en-GB" dirty="0"/>
-              <a:t>: Perfect for </a:t>
-            </a:r>
-            <a:r>
-              <a:rPr lang="en-GB" dirty="0">
-                <a:solidFill>
-                  <a:srgbClr val="FF0000"/>
-                </a:solidFill>
-              </a:rPr>
-              <a:t>exploratory data </a:t>
-            </a:r>
-            <a:r>
-              <a:rPr lang="en-GB" dirty="0"/>
-              <a:t>analysis where you want to create informative visualizations rapidly with </a:t>
-            </a:r>
-            <a:r>
-              <a:rPr lang="en-GB" dirty="0">
-                <a:solidFill>
-                  <a:srgbClr val="FF0000"/>
-                </a:solidFill>
-              </a:rPr>
-              <a:t>less focus </a:t>
-            </a:r>
-            <a:r>
-              <a:rPr lang="en-GB" dirty="0"/>
-              <a:t>on the minute details of plot appearance.</a:t>
+              <a:t>: Integrates seamlessly with the HoloViews workflow for plotting geographical data effectively.</a:t>
             </a:r>
           </a:p>
         </p:txBody>
       </p:sp>
+      <p:pic>
+        <p:nvPicPr>
+          <p:cNvPr id="3" name="Picture 2">
+            <a:extLst>
+              <a:ext uri="{FF2B5EF4-FFF2-40B4-BE49-F238E27FC236}">
+                <a16:creationId xmlns:a16="http://schemas.microsoft.com/office/drawing/2014/main" id="{62CBDB32-E7FE-42EE-8B31-B0F7B4941134}"/>
+              </a:ext>
+            </a:extLst>
+          </p:cNvPr>
+          <p:cNvPicPr>
+            <a:picLocks noChangeAspect="1"/>
+          </p:cNvPicPr>
+          <p:nvPr/>
+        </p:nvPicPr>
+        <p:blipFill rotWithShape="1">
+          <a:blip r:embed="rId2"/>
+          <a:srcRect l="25342" t="39844" r="29689" b="45312"/>
+          <a:stretch/>
+        </p:blipFill>
+        <p:spPr>
+          <a:xfrm>
+            <a:off x="1714500" y="6278992"/>
+            <a:ext cx="14035110" cy="2605950"/>
+          </a:xfrm>
+          <a:prstGeom prst="rect">
+            <a:avLst/>
+          </a:prstGeom>
+        </p:spPr>
+      </p:pic>
     </p:spTree>
     <p:extLst>
       <p:ext uri="{BB962C8B-B14F-4D97-AF65-F5344CB8AC3E}">
-        <p14:creationId xmlns:p14="http://schemas.microsoft.com/office/powerpoint/2010/main" val="1625794283"/>
+        <p14:creationId xmlns:p14="http://schemas.microsoft.com/office/powerpoint/2010/main" val="966033555"/>
       </p:ext>
     </p:extLst>
   </p:cSld>
@@ -4197,172 +4244,6 @@
             </a:pPr>
             <a:r>
               <a:rPr lang="en-GB" spc="-11" dirty="0" err="1"/>
-              <a:t>GeoViews</a:t>
-            </a:r>
-            <a:endParaRPr lang="en-GB" spc="-11" dirty="0"/>
-          </a:p>
-        </p:txBody>
-      </p:sp>
-      <p:sp>
-        <p:nvSpPr>
-          <p:cNvPr id="6" name="Text Placeholder 5">
-            <a:extLst>
-              <a:ext uri="{FF2B5EF4-FFF2-40B4-BE49-F238E27FC236}">
-                <a16:creationId xmlns:a16="http://schemas.microsoft.com/office/drawing/2014/main" id="{68386F04-F31C-45D6-91A9-D8EBCF9148DE}"/>
-              </a:ext>
-            </a:extLst>
-          </p:cNvPr>
-          <p:cNvSpPr>
-            <a:spLocks noGrp="1"/>
-          </p:cNvSpPr>
-          <p:nvPr>
-            <p:ph type="body" idx="1"/>
-          </p:nvPr>
-        </p:nvSpPr>
-        <p:spPr>
-          <a:xfrm>
-            <a:off x="493199" y="2091600"/>
-            <a:ext cx="16172477" cy="6286500"/>
-          </a:xfrm>
-          <a:ln w="12700">
-            <a:miter lim="400000"/>
-          </a:ln>
-        </p:spPr>
-        <p:txBody>
-          <a:bodyPr lIns="50800" tIns="50800" rIns="50800" bIns="50800" anchor="t">
-            <a:noAutofit/>
-          </a:bodyPr>
-          <a:lstStyle/>
-          <a:p>
-            <a:r>
-              <a:rPr lang="en-GB" dirty="0"/>
-              <a:t>Built on top </a:t>
-            </a:r>
-            <a:r>
-              <a:rPr lang="en-GB" dirty="0" err="1"/>
-              <a:t>HoloViews</a:t>
-            </a:r>
-            <a:r>
-              <a:rPr lang="en-GB" dirty="0"/>
-              <a:t> designed to make it easier to explore and visualize geographical datasets</a:t>
-            </a:r>
-          </a:p>
-          <a:p>
-            <a:r>
-              <a:rPr lang="en-GB" dirty="0"/>
-              <a:t>Geographic data handling.</a:t>
-            </a:r>
-          </a:p>
-          <a:p>
-            <a:endParaRPr lang="en-GB" dirty="0"/>
-          </a:p>
-          <a:p>
-            <a:r>
-              <a:rPr lang="en-GB" b="1" dirty="0"/>
-              <a:t>Strengths</a:t>
-            </a:r>
-            <a:r>
-              <a:rPr lang="en-GB" dirty="0"/>
-              <a:t>: Integrates seamlessly with the HoloViews workflow for plotting geographical data effectively.</a:t>
-            </a:r>
-          </a:p>
-        </p:txBody>
-      </p:sp>
-      <p:pic>
-        <p:nvPicPr>
-          <p:cNvPr id="3" name="Picture 2">
-            <a:extLst>
-              <a:ext uri="{FF2B5EF4-FFF2-40B4-BE49-F238E27FC236}">
-                <a16:creationId xmlns:a16="http://schemas.microsoft.com/office/drawing/2014/main" id="{62CBDB32-E7FE-42EE-8B31-B0F7B4941134}"/>
-              </a:ext>
-            </a:extLst>
-          </p:cNvPr>
-          <p:cNvPicPr>
-            <a:picLocks noChangeAspect="1"/>
-          </p:cNvPicPr>
-          <p:nvPr/>
-        </p:nvPicPr>
-        <p:blipFill rotWithShape="1">
-          <a:blip r:embed="rId2"/>
-          <a:srcRect l="25342" t="39844" r="29689" b="45312"/>
-          <a:stretch/>
-        </p:blipFill>
-        <p:spPr>
-          <a:xfrm>
-            <a:off x="1714500" y="6278992"/>
-            <a:ext cx="14035110" cy="2605950"/>
-          </a:xfrm>
-          <a:prstGeom prst="rect">
-            <a:avLst/>
-          </a:prstGeom>
-        </p:spPr>
-      </p:pic>
-    </p:spTree>
-    <p:extLst>
-      <p:ext uri="{BB962C8B-B14F-4D97-AF65-F5344CB8AC3E}">
-        <p14:creationId xmlns:p14="http://schemas.microsoft.com/office/powerpoint/2010/main" val="966033555"/>
-      </p:ext>
-    </p:extLst>
-  </p:cSld>
-  <p:clrMapOvr>
-    <a:masterClrMapping/>
-  </p:clrMapOvr>
-  <p:transition spd="med"/>
-</p:sld>
-</file>
-
-<file path=ppt/slides/slide6.xml><?xml version="1.0" encoding="utf-8"?>
-<p:sld xmlns:a="http://schemas.openxmlformats.org/drawingml/2006/main" xmlns:r="http://schemas.openxmlformats.org/officeDocument/2006/relationships" xmlns:p="http://schemas.openxmlformats.org/presentationml/2006/main">
-  <p:cSld>
-    <p:spTree>
-      <p:nvGrpSpPr>
-        <p:cNvPr id="1" name=""/>
-        <p:cNvGrpSpPr/>
-        <p:nvPr/>
-      </p:nvGrpSpPr>
-      <p:grpSpPr>
-        <a:xfrm>
-          <a:off x="0" y="0"/>
-          <a:ext cx="0" cy="0"/>
-          <a:chOff x="0" y="0"/>
-          <a:chExt cx="0" cy="0"/>
-        </a:xfrm>
-      </p:grpSpPr>
-      <p:sp>
-        <p:nvSpPr>
-          <p:cNvPr id="7" name="Title 6">
-            <a:extLst>
-              <a:ext uri="{FF2B5EF4-FFF2-40B4-BE49-F238E27FC236}">
-                <a16:creationId xmlns:a16="http://schemas.microsoft.com/office/drawing/2014/main" id="{4CF31C27-D594-4C5E-A1CD-12AF80B566C0}"/>
-              </a:ext>
-            </a:extLst>
-          </p:cNvPr>
-          <p:cNvSpPr>
-            <a:spLocks noGrp="1"/>
-          </p:cNvSpPr>
-          <p:nvPr>
-            <p:ph type="title"/>
-          </p:nvPr>
-        </p:nvSpPr>
-        <p:spPr>
-          <a:xfrm>
-            <a:off x="493200" y="871200"/>
-            <a:ext cx="14800185" cy="751658"/>
-          </a:xfrm>
-        </p:spPr>
-        <p:txBody>
-          <a:bodyPr vert="horz" wrap="square" lIns="0" tIns="12869" rIns="0" bIns="0" rtlCol="0">
-            <a:spAutoFit/>
-          </a:bodyPr>
-          <a:lstStyle/>
-          <a:p>
-            <a:pPr marL="13547">
-              <a:spcBef>
-                <a:spcPts val="101"/>
-              </a:spcBef>
-            </a:pPr>
-            <a:r>
-              <a:rPr lang="en-GB" spc="-11" dirty="0" err="1"/>
               <a:t>pydeck</a:t>
             </a:r>
             <a:endParaRPr lang="en-GB" spc="-11" dirty="0"/>
@@ -4482,7 +4363,7 @@
 </p:sld>
 </file>
 
-<file path=ppt/slides/slide7.xml><?xml version="1.0" encoding="utf-8"?>
+<file path=ppt/slides/slide6.xml><?xml version="1.0" encoding="utf-8"?>
 <p:sld xmlns:a="http://schemas.openxmlformats.org/drawingml/2006/main" xmlns:r="http://schemas.openxmlformats.org/officeDocument/2006/relationships" xmlns:p="http://schemas.openxmlformats.org/presentationml/2006/main">
   <p:cSld>
     <p:spTree>
@@ -6814,23 +6695,6 @@
 </file>
 
 <file path=customXml/item1.xml><?xml version="1.0" encoding="utf-8"?>
-<?mso-contentType ?>
-<FormTemplates xmlns="http://schemas.microsoft.com/sharepoint/v3/contenttype/forms">
-  <Display>DocumentLibraryForm</Display>
-  <Edit>DocumentLibraryForm</Edit>
-  <New>DocumentLibraryForm</New>
-</FormTemplates>
-</file>
-
-<file path=customXml/item2.xml><?xml version="1.0" encoding="utf-8"?>
-<p:properties xmlns:p="http://schemas.microsoft.com/office/2006/metadata/properties" xmlns:xsi="http://www.w3.org/2001/XMLSchema-instance" xmlns:pc="http://schemas.microsoft.com/office/infopath/2007/PartnerControls">
-  <documentManagement>
-    <_activity xmlns="5acde16a-ba3e-47db-ada8-7cd7fdb7807b" xsi:nil="true"/>
-  </documentManagement>
-</p:properties>
-</file>
-
-<file path=customXml/item3.xml><?xml version="1.0" encoding="utf-8"?>
 <ct:contentTypeSchema xmlns:ct="http://schemas.microsoft.com/office/2006/metadata/contentType" xmlns:ma="http://schemas.microsoft.com/office/2006/metadata/properties/metaAttributes" ct:_="" ma:_="" ma:contentTypeName="Document" ma:contentTypeID="0x010100EDF2D40A3A1C8642988A651B1ED39623" ma:contentTypeVersion="16" ma:contentTypeDescription="Create a new document." ma:contentTypeScope="" ma:versionID="4ce34b00d6c3aff9017019a844aaf3f3">
   <xsd:schema xmlns:xsd="http://www.w3.org/2001/XMLSchema" xmlns:xs="http://www.w3.org/2001/XMLSchema" xmlns:p="http://schemas.microsoft.com/office/2006/metadata/properties" xmlns:ns3="5acde16a-ba3e-47db-ada8-7cd7fdb7807b" xmlns:ns4="4d9e80ff-905f-4833-945e-5794c4d26dd9" targetNamespace="http://schemas.microsoft.com/office/2006/metadata/properties" ma:root="true" ma:fieldsID="e58f5e8b2bace791df80eb2757c3951d" ns3:_="" ns4:_="">
     <xsd:import namespace="5acde16a-ba3e-47db-ada8-7cd7fdb7807b"/>
@@ -7069,10 +6933,38 @@
 </ct:contentTypeSchema>
 </file>
 
+<file path=customXml/item2.xml><?xml version="1.0" encoding="utf-8"?>
+<p:properties xmlns:p="http://schemas.microsoft.com/office/2006/metadata/properties" xmlns:xsi="http://www.w3.org/2001/XMLSchema-instance" xmlns:pc="http://schemas.microsoft.com/office/infopath/2007/PartnerControls">
+  <documentManagement>
+    <_activity xmlns="5acde16a-ba3e-47db-ada8-7cd7fdb7807b" xsi:nil="true"/>
+  </documentManagement>
+</p:properties>
+</file>
+
+<file path=customXml/item3.xml><?xml version="1.0" encoding="utf-8"?>
+<?mso-contentType ?>
+<FormTemplates xmlns="http://schemas.microsoft.com/sharepoint/v3/contenttype/forms">
+  <Display>DocumentLibraryForm</Display>
+  <Edit>DocumentLibraryForm</Edit>
+  <New>DocumentLibraryForm</New>
+</FormTemplates>
+</file>
+
 <file path=customXml/itemProps1.xml><?xml version="1.0" encoding="utf-8"?>
-<ds:datastoreItem xmlns:ds="http://schemas.openxmlformats.org/officeDocument/2006/customXml" ds:itemID="{7C6DD498-36E4-439C-8C75-21144F194D21}">
+<ds:datastoreItem xmlns:ds="http://schemas.openxmlformats.org/officeDocument/2006/customXml" ds:itemID="{5E2D202A-CE11-4B7B-AFDF-2EA51FB09851}">
   <ds:schemaRefs>
-    <ds:schemaRef ds:uri="http://schemas.microsoft.com/sharepoint/v3/contenttype/forms"/>
+    <ds:schemaRef ds:uri="http://schemas.microsoft.com/office/2006/metadata/contentType"/>
+    <ds:schemaRef ds:uri="http://schemas.microsoft.com/office/2006/metadata/properties/metaAttributes"/>
+    <ds:schemaRef ds:uri="http://www.w3.org/2001/XMLSchema"/>
+    <ds:schemaRef ds:uri="http://schemas.microsoft.com/office/2006/metadata/properties"/>
+    <ds:schemaRef ds:uri="5acde16a-ba3e-47db-ada8-7cd7fdb7807b"/>
+    <ds:schemaRef ds:uri="4d9e80ff-905f-4833-945e-5794c4d26dd9"/>
+    <ds:schemaRef ds:uri="http://schemas.microsoft.com/office/2006/documentManagement/types"/>
+    <ds:schemaRef ds:uri="http://schemas.microsoft.com/office/infopath/2007/PartnerControls"/>
+    <ds:schemaRef ds:uri="http://schemas.openxmlformats.org/package/2006/metadata/core-properties"/>
+    <ds:schemaRef ds:uri="http://purl.org/dc/elements/1.1/"/>
+    <ds:schemaRef ds:uri="http://purl.org/dc/terms/"/>
+    <ds:schemaRef ds:uri="http://schemas.microsoft.com/internal/obd"/>
   </ds:schemaRefs>
 </ds:datastoreItem>
 </file>
@@ -7095,20 +6987,9 @@
 </file>
 
 <file path=customXml/itemProps3.xml><?xml version="1.0" encoding="utf-8"?>
-<ds:datastoreItem xmlns:ds="http://schemas.openxmlformats.org/officeDocument/2006/customXml" ds:itemID="{5E2D202A-CE11-4B7B-AFDF-2EA51FB09851}">
+<ds:datastoreItem xmlns:ds="http://schemas.openxmlformats.org/officeDocument/2006/customXml" ds:itemID="{7C6DD498-36E4-439C-8C75-21144F194D21}">
   <ds:schemaRefs>
-    <ds:schemaRef ds:uri="http://schemas.microsoft.com/office/2006/metadata/contentType"/>
-    <ds:schemaRef ds:uri="http://schemas.microsoft.com/office/2006/metadata/properties/metaAttributes"/>
-    <ds:schemaRef ds:uri="http://www.w3.org/2001/XMLSchema"/>
-    <ds:schemaRef ds:uri="http://schemas.microsoft.com/office/2006/metadata/properties"/>
-    <ds:schemaRef ds:uri="5acde16a-ba3e-47db-ada8-7cd7fdb7807b"/>
-    <ds:schemaRef ds:uri="4d9e80ff-905f-4833-945e-5794c4d26dd9"/>
-    <ds:schemaRef ds:uri="http://schemas.microsoft.com/office/2006/documentManagement/types"/>
-    <ds:schemaRef ds:uri="http://schemas.microsoft.com/office/infopath/2007/PartnerControls"/>
-    <ds:schemaRef ds:uri="http://schemas.openxmlformats.org/package/2006/metadata/core-properties"/>
-    <ds:schemaRef ds:uri="http://purl.org/dc/elements/1.1/"/>
-    <ds:schemaRef ds:uri="http://purl.org/dc/terms/"/>
-    <ds:schemaRef ds:uri="http://schemas.microsoft.com/internal/obd"/>
+    <ds:schemaRef ds:uri="http://schemas.microsoft.com/sharepoint/v3/contenttype/forms"/>
   </ds:schemaRefs>
 </ds:datastoreItem>
 </file>